--- a/public/fun/pack/pptx/familypro/가족소개프리미엄_45_반려동물과함께_베이비블루.pptx
+++ b/public/fun/pack/pptx/familypro/가족소개프리미엄_45_반려동물과함께_베이비블루.pptx
@@ -113,12 +113,12 @@
   <p:extLst>
     <p:ext uri="{521415D9-36F7-43E2-AB2F-B90AF26B5E84}">
       <p14:sectionLst xmlns:p14="http://schemas.microsoft.com/office/powerpoint/2010/main">
-        <p14:section name="시작" id="{7B739833-A98C-4D6B-B38F-4DA26081A9C4}">
+        <p14:section name="시작" id="{2BF7A8EF-8AAE-41C0-B808-A90596BF2CDD}">
           <p14:sldIdLst>
             <p14:sldId id="256"/>
           </p14:sldIdLst>
         </p14:section>
-        <p14:section name="본문" id="{834C8A07-C88E-4A94-BB4F-BCB87D89C526}">
+        <p14:section name="본문" id="{26AF98DD-B690-4701-A134-25D7C9BF154C}">
           <p14:sldIdLst>
             <p14:sldId id="257"/>
             <p14:sldId id="258"/>
@@ -127,7 +127,7 @@
             <p14:sldId id="261"/>
           </p14:sldIdLst>
         </p14:section>
-        <p14:section name="마무리" id="{957E5A07-44E7-484A-B8D8-6C26EF0AF93C}">
+        <p14:section name="마무리" id="{46E89A0E-D646-463F-BBFB-440DC584441D}">
           <p14:sldIdLst>
             <p14:sldId id="262"/>
           </p14:sldIdLst>
@@ -1564,7 +1564,7 @@
             </a:lvl1pPr>
           </a:lstStyle>
           <a:p>
-            <a:fld id="{44B6D218-AC84-419A-A544-4DA17538420A}" type="slidenum">
+            <a:fld id="{69D87729-4ABF-4DE2-8AD1-A5509841BD4B}" type="slidenum">
               <a:rPr lang="en-US"/>
               <a:t>‹#›</a:t>
             </a:fld>
@@ -2266,7 +2266,7 @@
             </a:lvl1pPr>
           </a:lstStyle>
           <a:p>
-            <a:fld id="{F8D656E9-A80E-43DE-880D-367AE4B1AA64}" type="slidenum">
+            <a:fld id="{89AC84F5-F06A-4711-8326-7A03836952C4}" type="slidenum">
               <a:rPr lang="en-US"/>
               <a:t>‹#›</a:t>
             </a:fld>
@@ -2944,7 +2944,7 @@
             </a:lvl1pPr>
           </a:lstStyle>
           <a:p>
-            <a:fld id="{1A1DC242-E31A-4442-AD74-E7A5CE88F450}" type="slidenum">
+            <a:fld id="{2D74B5C3-D533-485E-97CD-038625B349D9}" type="slidenum">
               <a:rPr lang="en-US"/>
               <a:t>‹#›</a:t>
             </a:fld>
@@ -3829,7 +3829,7 @@
           <a:p>
             <a:r>
               <a:rPr lang="ko-KR"/>
-              <a:t>반려동물과 함께 · 0000. 00. 00</a:t>
+              <a:t>반려동물과 함께 · 날짜 입력</a:t>
             </a:r>
           </a:p>
         </p:txBody>
@@ -4139,7 +4139,7 @@
           <a:bodyPr/>
           <a:lstStyle/>
           <a:p>
-            <a:fld id="{FC7E5B8E-8DBF-4A6F-AFB6-CC8B58298084}" type="slidenum">
+            <a:fld id="{2F112716-A4CD-4CC8-A6A9-1E09E430E7F9}" type="slidenum">
               <a:rPr lang="en-US"/>
               <a:t>‹#›</a:t>
             </a:fld>
@@ -4761,7 +4761,7 @@
           <a:bodyPr/>
           <a:lstStyle/>
           <a:p>
-            <a:fld id="{70CE8E50-D64E-47DD-A9A3-484268C8E1EF}" type="slidenum">
+            <a:fld id="{7BA4895A-BEB1-4B62-896B-68264335E3CA}" type="slidenum">
               <a:rPr lang="en-US"/>
               <a:t>‹#›</a:t>
             </a:fld>
@@ -5603,7 +5603,7 @@
           <a:bodyPr/>
           <a:lstStyle/>
           <a:p>
-            <a:fld id="{2BBD45E9-734A-4A6B-9530-695566F40942}" type="slidenum">
+            <a:fld id="{79FEEA73-209B-4D77-BF12-554E0A809130}" type="slidenum">
               <a:rPr lang="en-US"/>
               <a:t>‹#›</a:t>
             </a:fld>
@@ -6915,7 +6915,7 @@
           <a:bodyPr/>
           <a:lstStyle/>
           <a:p>
-            <a:fld id="{0696B9FF-18D9-427B-9593-D0D30944DEDF}" type="slidenum">
+            <a:fld id="{A227F55D-3784-4AF2-A196-615B4686078E}" type="slidenum">
               <a:rPr lang="en-US"/>
               <a:t>‹#›</a:t>
             </a:fld>
@@ -7003,7 +7003,7 @@
           <a:bodyPr/>
           <a:lstStyle/>
           <a:p>
-            <a:fld id="{430362C8-C60C-4252-BE87-F1F2972A4892}" type="slidenum">
+            <a:fld id="{E49ABF6D-41D6-41BD-92FF-909404568C8A}" type="slidenum">
               <a:rPr lang="en-US"/>
               <a:t>‹#›</a:t>
             </a:fld>
